--- a/Construction Multi-Agent System Presentation.pptx
+++ b/Construction Multi-Agent System Presentation.pptx
@@ -4085,7 +4085,7 @@
               </a:defRPr>
             </a:pPr>
             <a:r>
-              <a:t>72 repository tests + 3 stress tests passed</a:t>
+              <a:t>73 repository tests + 3 stress tests passed</a:t>
             </a:r>
           </a:p>
           <a:p>
